--- a/images/charts.pptx
+++ b/images/charts.pptx
@@ -272,7 +272,7 @@
           <a:p>
             <a:fld id="{0D79BBE2-0B2D-48EC-ABEC-0FA514BE10AA}" type="datetimeFigureOut">
               <a:rPr kumimoji="1" lang="ja-JP" altLang="en-US" smtClean="0"/>
-              <a:t>2022/3/4</a:t>
+              <a:t>2026/3/8</a:t>
             </a:fld>
             <a:endParaRPr kumimoji="1" lang="ja-JP" altLang="en-US"/>
           </a:p>
@@ -502,7 +502,7 @@
           <a:p>
             <a:fld id="{0D79BBE2-0B2D-48EC-ABEC-0FA514BE10AA}" type="datetimeFigureOut">
               <a:rPr kumimoji="1" lang="ja-JP" altLang="en-US" smtClean="0"/>
-              <a:t>2022/3/4</a:t>
+              <a:t>2026/3/8</a:t>
             </a:fld>
             <a:endParaRPr kumimoji="1" lang="ja-JP" altLang="en-US"/>
           </a:p>
@@ -742,7 +742,7 @@
           <a:p>
             <a:fld id="{0D79BBE2-0B2D-48EC-ABEC-0FA514BE10AA}" type="datetimeFigureOut">
               <a:rPr kumimoji="1" lang="ja-JP" altLang="en-US" smtClean="0"/>
-              <a:t>2022/3/4</a:t>
+              <a:t>2026/3/8</a:t>
             </a:fld>
             <a:endParaRPr kumimoji="1" lang="ja-JP" altLang="en-US"/>
           </a:p>
@@ -972,7 +972,7 @@
           <a:p>
             <a:fld id="{0D79BBE2-0B2D-48EC-ABEC-0FA514BE10AA}" type="datetimeFigureOut">
               <a:rPr kumimoji="1" lang="ja-JP" altLang="en-US" smtClean="0"/>
-              <a:t>2022/3/4</a:t>
+              <a:t>2026/3/8</a:t>
             </a:fld>
             <a:endParaRPr kumimoji="1" lang="ja-JP" altLang="en-US"/>
           </a:p>
@@ -1247,7 +1247,7 @@
           <a:p>
             <a:fld id="{0D79BBE2-0B2D-48EC-ABEC-0FA514BE10AA}" type="datetimeFigureOut">
               <a:rPr kumimoji="1" lang="ja-JP" altLang="en-US" smtClean="0"/>
-              <a:t>2022/3/4</a:t>
+              <a:t>2026/3/8</a:t>
             </a:fld>
             <a:endParaRPr kumimoji="1" lang="ja-JP" altLang="en-US"/>
           </a:p>
@@ -1576,7 +1576,7 @@
           <a:p>
             <a:fld id="{0D79BBE2-0B2D-48EC-ABEC-0FA514BE10AA}" type="datetimeFigureOut">
               <a:rPr kumimoji="1" lang="ja-JP" altLang="en-US" smtClean="0"/>
-              <a:t>2022/3/4</a:t>
+              <a:t>2026/3/8</a:t>
             </a:fld>
             <a:endParaRPr kumimoji="1" lang="ja-JP" altLang="en-US"/>
           </a:p>
@@ -2052,7 +2052,7 @@
           <a:p>
             <a:fld id="{0D79BBE2-0B2D-48EC-ABEC-0FA514BE10AA}" type="datetimeFigureOut">
               <a:rPr kumimoji="1" lang="ja-JP" altLang="en-US" smtClean="0"/>
-              <a:t>2022/3/4</a:t>
+              <a:t>2026/3/8</a:t>
             </a:fld>
             <a:endParaRPr kumimoji="1" lang="ja-JP" altLang="en-US"/>
           </a:p>
@@ -2193,7 +2193,7 @@
           <a:p>
             <a:fld id="{0D79BBE2-0B2D-48EC-ABEC-0FA514BE10AA}" type="datetimeFigureOut">
               <a:rPr kumimoji="1" lang="ja-JP" altLang="en-US" smtClean="0"/>
-              <a:t>2022/3/4</a:t>
+              <a:t>2026/3/8</a:t>
             </a:fld>
             <a:endParaRPr kumimoji="1" lang="ja-JP" altLang="en-US"/>
           </a:p>
@@ -2306,7 +2306,7 @@
           <a:p>
             <a:fld id="{0D79BBE2-0B2D-48EC-ABEC-0FA514BE10AA}" type="datetimeFigureOut">
               <a:rPr kumimoji="1" lang="ja-JP" altLang="en-US" smtClean="0"/>
-              <a:t>2022/3/4</a:t>
+              <a:t>2026/3/8</a:t>
             </a:fld>
             <a:endParaRPr kumimoji="1" lang="ja-JP" altLang="en-US"/>
           </a:p>
@@ -2649,7 +2649,7 @@
           <a:p>
             <a:fld id="{0D79BBE2-0B2D-48EC-ABEC-0FA514BE10AA}" type="datetimeFigureOut">
               <a:rPr kumimoji="1" lang="ja-JP" altLang="en-US" smtClean="0"/>
-              <a:t>2022/3/4</a:t>
+              <a:t>2026/3/8</a:t>
             </a:fld>
             <a:endParaRPr kumimoji="1" lang="ja-JP" altLang="en-US"/>
           </a:p>
@@ -2937,7 +2937,7 @@
           <a:p>
             <a:fld id="{0D79BBE2-0B2D-48EC-ABEC-0FA514BE10AA}" type="datetimeFigureOut">
               <a:rPr kumimoji="1" lang="ja-JP" altLang="en-US" smtClean="0"/>
-              <a:t>2022/3/4</a:t>
+              <a:t>2026/3/8</a:t>
             </a:fld>
             <a:endParaRPr kumimoji="1" lang="ja-JP" altLang="en-US"/>
           </a:p>
@@ -3210,7 +3210,7 @@
           <a:p>
             <a:fld id="{0D79BBE2-0B2D-48EC-ABEC-0FA514BE10AA}" type="datetimeFigureOut">
               <a:rPr kumimoji="1" lang="ja-JP" altLang="en-US" smtClean="0"/>
-              <a:t>2022/3/4</a:t>
+              <a:t>2026/3/8</a:t>
             </a:fld>
             <a:endParaRPr kumimoji="1" lang="ja-JP" altLang="en-US"/>
           </a:p>
@@ -6819,10 +6819,10 @@
       </p:grpSpPr>
       <p:pic>
         <p:nvPicPr>
-          <p:cNvPr id="5" name="図 4" descr="グラフィカル ユーザー インターフェイス, テキスト, アプリケーション, メール&#10;&#10;自動的に生成された説明">
+          <p:cNvPr id="2" name="図 1">
             <a:extLst>
               <a:ext uri="{FF2B5EF4-FFF2-40B4-BE49-F238E27FC236}">
-                <a16:creationId xmlns:a16="http://schemas.microsoft.com/office/drawing/2014/main" id="{C9E6656F-B6E5-1B46-9F85-5ABE6795A224}"/>
+                <a16:creationId xmlns:a16="http://schemas.microsoft.com/office/drawing/2014/main" id="{07A8180F-6762-5120-CCF6-5A61E0AB5191}"/>
               </a:ext>
             </a:extLst>
           </p:cNvPr>
@@ -6831,21 +6831,17 @@
           </p:cNvPicPr>
           <p:nvPr/>
         </p:nvPicPr>
-        <p:blipFill rotWithShape="1">
-          <a:blip r:embed="rId2">
-            <a:extLst>
-              <a:ext uri="{28A0092B-C50C-407E-A947-70E740481C1C}">
-                <a14:useLocalDpi xmlns:a14="http://schemas.microsoft.com/office/drawing/2010/main" val="0"/>
-              </a:ext>
-            </a:extLst>
-          </a:blip>
-          <a:srcRect r="24069"/>
-          <a:stretch/>
+        <p:blipFill>
+          <a:blip r:embed="rId2"/>
+          <a:srcRect t="28966" r="13506"/>
+          <a:stretch>
+            <a:fillRect/>
+          </a:stretch>
         </p:blipFill>
         <p:spPr>
           <a:xfrm>
-            <a:off x="216889" y="103567"/>
-            <a:ext cx="6599132" cy="5542657"/>
+            <a:off x="166215" y="1110835"/>
+            <a:ext cx="7394893" cy="4137291"/>
           </a:xfrm>
           <a:prstGeom prst="rect">
             <a:avLst/>
@@ -6880,7 +6876,7 @@
         </p:blipFill>
         <p:spPr>
           <a:xfrm>
-            <a:off x="5699349" y="845244"/>
+            <a:off x="5853047" y="1461919"/>
             <a:ext cx="6554124" cy="3761173"/>
           </a:xfrm>
           <a:prstGeom prst="rect">
@@ -6902,8 +6898,8 @@
         </p:nvSpPr>
         <p:spPr>
           <a:xfrm>
-            <a:off x="751249" y="1579510"/>
-            <a:ext cx="3112413" cy="1981498"/>
+            <a:off x="1052588" y="1609873"/>
+            <a:ext cx="4078735" cy="1629013"/>
           </a:xfrm>
           <a:prstGeom prst="roundRect">
             <a:avLst>
@@ -6956,8 +6952,8 @@
         </p:nvSpPr>
         <p:spPr>
           <a:xfrm>
-            <a:off x="751249" y="3561008"/>
-            <a:ext cx="1991951" cy="1045409"/>
+            <a:off x="1052588" y="3238887"/>
+            <a:ext cx="3114167" cy="886304"/>
           </a:xfrm>
           <a:prstGeom prst="roundRect">
             <a:avLst>
@@ -7010,8 +7006,8 @@
         </p:nvSpPr>
         <p:spPr>
           <a:xfrm>
-            <a:off x="966168" y="1823121"/>
-            <a:ext cx="2569083" cy="990914"/>
+            <a:off x="1368876" y="1874486"/>
+            <a:ext cx="3682498" cy="549894"/>
           </a:xfrm>
           <a:prstGeom prst="roundRect">
             <a:avLst>
@@ -7067,8 +7063,8 @@
         </p:nvCxnSpPr>
         <p:spPr>
           <a:xfrm flipV="1">
-            <a:off x="2743200" y="2981459"/>
-            <a:ext cx="4269346" cy="1102254"/>
+            <a:off x="4166755" y="3589970"/>
+            <a:ext cx="2982190" cy="92069"/>
           </a:xfrm>
           <a:prstGeom prst="line">
             <a:avLst/>
@@ -7105,14 +7101,14 @@
           </p:cNvPr>
           <p:cNvCxnSpPr>
             <a:cxnSpLocks/>
-            <a:stCxn id="10" idx="3"/>
+            <a:stCxn id="8" idx="3"/>
           </p:cNvCxnSpPr>
           <p:nvPr/>
         </p:nvCxnSpPr>
         <p:spPr>
           <a:xfrm flipV="1">
-            <a:off x="3535251" y="1076148"/>
-            <a:ext cx="4089042" cy="1242430"/>
+            <a:off x="5131323" y="1735282"/>
+            <a:ext cx="2651468" cy="689098"/>
           </a:xfrm>
           <a:prstGeom prst="line">
             <a:avLst/>
@@ -7153,7 +7149,7 @@
         <p:spPr>
           <a:xfrm>
             <a:off x="289916" y="5889835"/>
-            <a:ext cx="2246128" cy="369332"/>
+            <a:ext cx="1898277" cy="369332"/>
           </a:xfrm>
           <a:prstGeom prst="rect">
             <a:avLst/>
@@ -7168,7 +7164,7 @@
           <a:p>
             <a:r>
               <a:rPr lang="en-US" altLang="ja-JP" dirty="0"/>
-              <a:t>ruby_sample05.png</a:t>
+              <a:t>c_sample05.png</a:t>
             </a:r>
             <a:endParaRPr kumimoji="1" lang="en-US" altLang="ja-JP" dirty="0"/>
           </a:p>
@@ -7204,6 +7200,93 @@
           <a:chExt cx="0" cy="0"/>
         </a:xfrm>
       </p:grpSpPr>
+      <p:grpSp>
+        <p:nvGrpSpPr>
+          <p:cNvPr id="6" name="グループ化 5">
+            <a:extLst>
+              <a:ext uri="{FF2B5EF4-FFF2-40B4-BE49-F238E27FC236}">
+                <a16:creationId xmlns:a16="http://schemas.microsoft.com/office/drawing/2014/main" id="{F671B84D-2A7A-CDDE-77C4-9DB431CC2659}"/>
+              </a:ext>
+            </a:extLst>
+          </p:cNvPr>
+          <p:cNvGrpSpPr/>
+          <p:nvPr/>
+        </p:nvGrpSpPr>
+        <p:grpSpPr>
+          <a:xfrm>
+            <a:off x="72829" y="658379"/>
+            <a:ext cx="8590654" cy="4384366"/>
+            <a:chOff x="198159" y="1886106"/>
+            <a:chExt cx="7809685" cy="3985787"/>
+          </a:xfrm>
+        </p:grpSpPr>
+        <p:pic>
+          <p:nvPicPr>
+            <p:cNvPr id="5" name="図 4">
+              <a:extLst>
+                <a:ext uri="{FF2B5EF4-FFF2-40B4-BE49-F238E27FC236}">
+                  <a16:creationId xmlns:a16="http://schemas.microsoft.com/office/drawing/2014/main" id="{B8D10A9C-E042-CA0B-C6DB-824B5E045A91}"/>
+                </a:ext>
+              </a:extLst>
+            </p:cNvPr>
+            <p:cNvPicPr>
+              <a:picLocks noChangeAspect="1"/>
+            </p:cNvPicPr>
+            <p:nvPr/>
+          </p:nvPicPr>
+          <p:blipFill>
+            <a:blip r:embed="rId2"/>
+            <a:stretch>
+              <a:fillRect/>
+            </a:stretch>
+          </p:blipFill>
+          <p:spPr>
+            <a:xfrm>
+              <a:off x="198159" y="5367619"/>
+              <a:ext cx="7772400" cy="504274"/>
+            </a:xfrm>
+            <a:prstGeom prst="rect">
+              <a:avLst/>
+            </a:prstGeom>
+          </p:spPr>
+        </p:pic>
+        <p:pic>
+          <p:nvPicPr>
+            <p:cNvPr id="4" name="図 3" descr="グラフィカル ユーザー インターフェイス, テキスト, アプリケーション&#10;&#10;AI 生成コンテンツは誤りを含む可能性があります。">
+              <a:extLst>
+                <a:ext uri="{FF2B5EF4-FFF2-40B4-BE49-F238E27FC236}">
+                  <a16:creationId xmlns:a16="http://schemas.microsoft.com/office/drawing/2014/main" id="{87E92C9A-EE92-6DB0-6ED0-EE24CB0CC031}"/>
+                </a:ext>
+              </a:extLst>
+            </p:cNvPr>
+            <p:cNvPicPr>
+              <a:picLocks noChangeAspect="1"/>
+            </p:cNvPicPr>
+            <p:nvPr/>
+          </p:nvPicPr>
+          <p:blipFill>
+            <a:blip r:embed="rId3">
+              <a:extLst>
+                <a:ext uri="{28A0092B-C50C-407E-A947-70E740481C1C}">
+                  <a14:useLocalDpi xmlns:a14="http://schemas.microsoft.com/office/drawing/2010/main" val="0"/>
+                </a:ext>
+              </a:extLst>
+            </a:blip>
+            <a:stretch>
+              <a:fillRect/>
+            </a:stretch>
+          </p:blipFill>
+          <p:spPr>
+            <a:xfrm>
+              <a:off x="235444" y="1886106"/>
+              <a:ext cx="7772400" cy="3540881"/>
+            </a:xfrm>
+            <a:prstGeom prst="rect">
+              <a:avLst/>
+            </a:prstGeom>
+          </p:spPr>
+        </p:pic>
+      </p:grpSp>
       <p:pic>
         <p:nvPicPr>
           <p:cNvPr id="21" name="図 20" descr="ダイアグラム&#10;&#10;自動的に生成された説明">
@@ -7219,7 +7302,7 @@
           <p:nvPr/>
         </p:nvPicPr>
         <p:blipFill>
-          <a:blip r:embed="rId2">
+          <a:blip r:embed="rId4">
             <a:extLst>
               <a:ext uri="{28A0092B-C50C-407E-A947-70E740481C1C}">
                 <a14:useLocalDpi xmlns:a14="http://schemas.microsoft.com/office/drawing/2010/main" val="0"/>
@@ -7240,47 +7323,12 @@
           </a:prstGeom>
         </p:spPr>
       </p:pic>
-      <p:pic>
-        <p:nvPicPr>
-          <p:cNvPr id="3" name="図 2" descr="グラフィカル ユーザー インターフェイス, テキスト, アプリケーション, チャットまたはテキスト メッセージ, Teams&#10;&#10;自動的に生成された説明">
-            <a:extLst>
-              <a:ext uri="{FF2B5EF4-FFF2-40B4-BE49-F238E27FC236}">
-                <a16:creationId xmlns:a16="http://schemas.microsoft.com/office/drawing/2014/main" id="{2CF4082C-BDDA-804D-8323-6B60447C5D82}"/>
-              </a:ext>
-            </a:extLst>
-          </p:cNvPr>
-          <p:cNvPicPr>
-            <a:picLocks noChangeAspect="1"/>
-          </p:cNvPicPr>
-          <p:nvPr/>
-        </p:nvPicPr>
-        <p:blipFill rotWithShape="1">
-          <a:blip r:embed="rId3">
-            <a:extLst>
-              <a:ext uri="{28A0092B-C50C-407E-A947-70E740481C1C}">
-                <a14:useLocalDpi xmlns:a14="http://schemas.microsoft.com/office/drawing/2010/main" val="0"/>
-              </a:ext>
-            </a:extLst>
-          </a:blip>
-          <a:srcRect r="58490"/>
-          <a:stretch/>
-        </p:blipFill>
-        <p:spPr>
-          <a:xfrm>
-            <a:off x="216889" y="0"/>
-            <a:ext cx="4219883" cy="6858000"/>
-          </a:xfrm>
-          <a:prstGeom prst="rect">
-            <a:avLst/>
-          </a:prstGeom>
-        </p:spPr>
-      </p:pic>
       <p:sp>
         <p:nvSpPr>
-          <p:cNvPr id="8" name="角丸四角形 7">
+          <p:cNvPr id="9" name="角丸四角形 8">
             <a:extLst>
               <a:ext uri="{FF2B5EF4-FFF2-40B4-BE49-F238E27FC236}">
-                <a16:creationId xmlns:a16="http://schemas.microsoft.com/office/drawing/2014/main" id="{722217F9-2B6E-584E-8D3D-A2C816097E33}"/>
+                <a16:creationId xmlns:a16="http://schemas.microsoft.com/office/drawing/2014/main" id="{4047878C-64BD-9B48-91BA-D92E475809F8}"/>
               </a:ext>
             </a:extLst>
           </p:cNvPr>
@@ -7289,62 +7337,8 @@
         </p:nvSpPr>
         <p:spPr>
           <a:xfrm>
-            <a:off x="751249" y="1738647"/>
-            <a:ext cx="3112413" cy="2629653"/>
-          </a:xfrm>
-          <a:prstGeom prst="roundRect">
-            <a:avLst>
-              <a:gd name="adj" fmla="val 3490"/>
-            </a:avLst>
-          </a:prstGeom>
-          <a:noFill/>
-          <a:ln w="28575">
-            <a:solidFill>
-              <a:srgbClr val="C00000"/>
-            </a:solidFill>
-          </a:ln>
-        </p:spPr>
-        <p:style>
-          <a:lnRef idx="2">
-            <a:schemeClr val="accent1">
-              <a:shade val="50000"/>
-            </a:schemeClr>
-          </a:lnRef>
-          <a:fillRef idx="1">
-            <a:schemeClr val="accent1"/>
-          </a:fillRef>
-          <a:effectRef idx="0">
-            <a:schemeClr val="accent1"/>
-          </a:effectRef>
-          <a:fontRef idx="minor">
-            <a:schemeClr val="lt1"/>
-          </a:fontRef>
-        </p:style>
-        <p:txBody>
-          <a:bodyPr rtlCol="0" anchor="ctr"/>
-          <a:lstStyle/>
-          <a:p>
-            <a:pPr algn="ctr"/>
-            <a:endParaRPr kumimoji="1" lang="ja-JP" altLang="en-US"/>
-          </a:p>
-        </p:txBody>
-      </p:sp>
-      <p:sp>
-        <p:nvSpPr>
-          <p:cNvPr id="9" name="角丸四角形 8">
-            <a:extLst>
-              <a:ext uri="{FF2B5EF4-FFF2-40B4-BE49-F238E27FC236}">
-                <a16:creationId xmlns:a16="http://schemas.microsoft.com/office/drawing/2014/main" id="{4047878C-64BD-9B48-91BA-D92E475809F8}"/>
-              </a:ext>
-            </a:extLst>
-          </p:cNvPr>
-          <p:cNvSpPr/>
-          <p:nvPr/>
-        </p:nvSpPr>
-        <p:spPr>
-          <a:xfrm>
-            <a:off x="751249" y="4368301"/>
-            <a:ext cx="2246128" cy="910189"/>
+            <a:off x="903588" y="3274330"/>
+            <a:ext cx="4586192" cy="606564"/>
           </a:xfrm>
           <a:prstGeom prst="roundRect">
             <a:avLst>
@@ -7397,8 +7391,8 @@
         </p:nvSpPr>
         <p:spPr>
           <a:xfrm>
-            <a:off x="821155" y="1785513"/>
-            <a:ext cx="2952355" cy="816019"/>
+            <a:off x="907438" y="1231608"/>
+            <a:ext cx="2952355" cy="429581"/>
           </a:xfrm>
           <a:prstGeom prst="roundRect">
             <a:avLst>
@@ -7454,8 +7448,8 @@
         </p:nvCxnSpPr>
         <p:spPr>
           <a:xfrm flipV="1">
-            <a:off x="2997377" y="2489699"/>
-            <a:ext cx="4993964" cy="2333697"/>
+            <a:off x="5489780" y="2462645"/>
+            <a:ext cx="2500829" cy="1114967"/>
           </a:xfrm>
           <a:prstGeom prst="line">
             <a:avLst/>
@@ -7496,7 +7490,7 @@
         <p:spPr>
           <a:xfrm>
             <a:off x="9662516" y="6389349"/>
-            <a:ext cx="2246128" cy="369332"/>
+            <a:ext cx="1898277" cy="369332"/>
           </a:xfrm>
           <a:prstGeom prst="rect">
             <a:avLst/>
@@ -7511,7 +7505,7 @@
           <a:p>
             <a:r>
               <a:rPr lang="en-US" altLang="ja-JP" dirty="0"/>
-              <a:t>ruby_sample08.png</a:t>
+              <a:t>c_sample08.png</a:t>
             </a:r>
             <a:endParaRPr kumimoji="1" lang="en-US" altLang="ja-JP" dirty="0"/>
           </a:p>
@@ -7531,8 +7525,8 @@
         </p:nvSpPr>
         <p:spPr>
           <a:xfrm>
-            <a:off x="3773509" y="468651"/>
-            <a:ext cx="7667242" cy="1803902"/>
+            <a:off x="3871842" y="848221"/>
+            <a:ext cx="7730706" cy="1424334"/>
           </a:xfrm>
           <a:custGeom>
             <a:avLst/>
@@ -7545,42 +7539,114 @@
               <a:gd name="connsiteY2" fmla="*/ 162414 h 1849546"/>
               <a:gd name="connsiteX3" fmla="*/ 7295882 w 7295882"/>
               <a:gd name="connsiteY3" fmla="*/ 1849546 h 1849546"/>
+              <a:gd name="csX0" fmla="*/ 0 w 7397720"/>
+              <a:gd name="csY0" fmla="*/ 1567503 h 1840994"/>
+              <a:gd name="csX1" fmla="*/ 3443905 w 7397720"/>
+              <a:gd name="csY1" fmla="*/ 237574 h 1840994"/>
+              <a:gd name="csX2" fmla="*/ 5549601 w 7397720"/>
+              <a:gd name="csY2" fmla="*/ 153862 h 1840994"/>
+              <a:gd name="csX3" fmla="*/ 7397720 w 7397720"/>
+              <a:gd name="csY3" fmla="*/ 1840994 h 1840994"/>
+              <a:gd name="csX0" fmla="*/ 0 w 7428272"/>
+              <a:gd name="csY0" fmla="*/ 1533987 h 1839439"/>
+              <a:gd name="csX1" fmla="*/ 3474457 w 7428272"/>
+              <a:gd name="csY1" fmla="*/ 236019 h 1839439"/>
+              <a:gd name="csX2" fmla="*/ 5580153 w 7428272"/>
+              <a:gd name="csY2" fmla="*/ 152307 h 1839439"/>
+              <a:gd name="csX3" fmla="*/ 7428272 w 7428272"/>
+              <a:gd name="csY3" fmla="*/ 1839439 h 1839439"/>
+              <a:gd name="csX0" fmla="*/ 0 w 7418088"/>
+              <a:gd name="csY0" fmla="*/ 988836 h 1816326"/>
+              <a:gd name="csX1" fmla="*/ 3464273 w 7418088"/>
+              <a:gd name="csY1" fmla="*/ 212906 h 1816326"/>
+              <a:gd name="csX2" fmla="*/ 5569969 w 7418088"/>
+              <a:gd name="csY2" fmla="*/ 129194 h 1816326"/>
+              <a:gd name="csX3" fmla="*/ 7418088 w 7418088"/>
+              <a:gd name="csY3" fmla="*/ 1816326 h 1816326"/>
+              <a:gd name="csX0" fmla="*/ 0 w 7418088"/>
+              <a:gd name="csY0" fmla="*/ 1026363 h 1853853"/>
+              <a:gd name="csX1" fmla="*/ 3118022 w 7418088"/>
+              <a:gd name="csY1" fmla="*/ 143895 h 1853853"/>
+              <a:gd name="csX2" fmla="*/ 5569969 w 7418088"/>
+              <a:gd name="csY2" fmla="*/ 166721 h 1853853"/>
+              <a:gd name="csX3" fmla="*/ 7418088 w 7418088"/>
+              <a:gd name="csY3" fmla="*/ 1853853 h 1853853"/>
+              <a:gd name="csX0" fmla="*/ 0 w 7418088"/>
+              <a:gd name="csY0" fmla="*/ 929589 h 1757079"/>
+              <a:gd name="csX1" fmla="*/ 3118022 w 7418088"/>
+              <a:gd name="csY1" fmla="*/ 47121 h 1757079"/>
+              <a:gd name="csX2" fmla="*/ 5488498 w 7418088"/>
+              <a:gd name="csY2" fmla="*/ 283024 h 1757079"/>
+              <a:gd name="csX3" fmla="*/ 7418088 w 7418088"/>
+              <a:gd name="csY3" fmla="*/ 1757079 h 1757079"/>
+              <a:gd name="csX0" fmla="*/ 0 w 7418088"/>
+              <a:gd name="csY0" fmla="*/ 894931 h 1722421"/>
+              <a:gd name="csX1" fmla="*/ 3118022 w 7418088"/>
+              <a:gd name="csY1" fmla="*/ 12463 h 1722421"/>
+              <a:gd name="csX2" fmla="*/ 7046628 w 7418088"/>
+              <a:gd name="csY2" fmla="*/ 461442 h 1722421"/>
+              <a:gd name="csX3" fmla="*/ 7418088 w 7418088"/>
+              <a:gd name="csY3" fmla="*/ 1722421 h 1722421"/>
+              <a:gd name="csX0" fmla="*/ 0 w 7576661"/>
+              <a:gd name="csY0" fmla="*/ 894931 h 1722421"/>
+              <a:gd name="csX1" fmla="*/ 3118022 w 7576661"/>
+              <a:gd name="csY1" fmla="*/ 12463 h 1722421"/>
+              <a:gd name="csX2" fmla="*/ 7046628 w 7576661"/>
+              <a:gd name="csY2" fmla="*/ 461442 h 1722421"/>
+              <a:gd name="csX3" fmla="*/ 7418088 w 7576661"/>
+              <a:gd name="csY3" fmla="*/ 1722421 h 1722421"/>
+              <a:gd name="csX0" fmla="*/ 0 w 7576661"/>
+              <a:gd name="csY0" fmla="*/ 632885 h 1460375"/>
+              <a:gd name="csX1" fmla="*/ 3209676 w 7576661"/>
+              <a:gd name="csY1" fmla="*/ 59377 h 1460375"/>
+              <a:gd name="csX2" fmla="*/ 7046628 w 7576661"/>
+              <a:gd name="csY2" fmla="*/ 199396 h 1460375"/>
+              <a:gd name="csX3" fmla="*/ 7418088 w 7576661"/>
+              <a:gd name="csY3" fmla="*/ 1460375 h 1460375"/>
+              <a:gd name="csX0" fmla="*/ 0 w 7576661"/>
+              <a:gd name="csY0" fmla="*/ 632885 h 1460375"/>
+              <a:gd name="csX1" fmla="*/ 3209676 w 7576661"/>
+              <a:gd name="csY1" fmla="*/ 59377 h 1460375"/>
+              <a:gd name="csX2" fmla="*/ 7046628 w 7576661"/>
+              <a:gd name="csY2" fmla="*/ 199396 h 1460375"/>
+              <a:gd name="csX3" fmla="*/ 7418088 w 7576661"/>
+              <a:gd name="csY3" fmla="*/ 1460375 h 1460375"/>
             </a:gdLst>
             <a:ahLst/>
             <a:cxnLst>
               <a:cxn ang="0">
-                <a:pos x="connsiteX0" y="connsiteY0"/>
+                <a:pos x="csX0" y="csY0"/>
               </a:cxn>
               <a:cxn ang="0">
-                <a:pos x="connsiteX1" y="connsiteY1"/>
+                <a:pos x="csX1" y="csY1"/>
               </a:cxn>
               <a:cxn ang="0">
-                <a:pos x="connsiteX2" y="connsiteY2"/>
+                <a:pos x="csX2" y="csY2"/>
               </a:cxn>
               <a:cxn ang="0">
-                <a:pos x="connsiteX3" y="connsiteY3"/>
+                <a:pos x="csX3" y="csY3"/>
               </a:cxn>
             </a:cxnLst>
             <a:rect l="l" t="t" r="r" b="b"/>
             <a:pathLst>
-              <a:path w="7295882" h="1849546">
+              <a:path w="7576661" h="1460375">
                 <a:moveTo>
-                  <a:pt x="0" y="1746515"/>
+                  <a:pt x="0" y="632885"/>
                 </a:moveTo>
                 <a:cubicBezTo>
-                  <a:pt x="1217053" y="1128329"/>
-                  <a:pt x="2434107" y="510143"/>
-                  <a:pt x="3342067" y="246126"/>
+                  <a:pt x="1481834" y="185160"/>
+                  <a:pt x="2035238" y="131625"/>
+                  <a:pt x="3209676" y="59377"/>
                 </a:cubicBezTo>
                 <a:cubicBezTo>
-                  <a:pt x="4250028" y="-17891"/>
-                  <a:pt x="4788794" y="-104823"/>
-                  <a:pt x="5447763" y="162414"/>
+                  <a:pt x="4384114" y="-12871"/>
+                  <a:pt x="6387659" y="-67841"/>
+                  <a:pt x="7046628" y="199396"/>
                 </a:cubicBezTo>
                 <a:cubicBezTo>
-                  <a:pt x="6106732" y="429651"/>
-                  <a:pt x="6701307" y="1139598"/>
-                  <a:pt x="7295882" y="1849546"/>
+                  <a:pt x="7705597" y="466633"/>
+                  <a:pt x="7648406" y="856965"/>
+                  <a:pt x="7418088" y="1460375"/>
                 </a:cubicBezTo>
               </a:path>
             </a:pathLst>
@@ -7631,8 +7697,8 @@
         </p:nvSpPr>
         <p:spPr>
           <a:xfrm>
-            <a:off x="993726" y="2604662"/>
-            <a:ext cx="2779783" cy="609185"/>
+            <a:off x="1295062" y="1659155"/>
+            <a:ext cx="5193874" cy="609185"/>
           </a:xfrm>
           <a:prstGeom prst="roundRect">
             <a:avLst>
@@ -7685,8 +7751,8 @@
         </p:nvSpPr>
         <p:spPr>
           <a:xfrm>
-            <a:off x="993725" y="3213847"/>
-            <a:ext cx="2779783" cy="1126332"/>
+            <a:off x="1295062" y="2273475"/>
+            <a:ext cx="4586193" cy="791839"/>
           </a:xfrm>
           <a:prstGeom prst="roundRect">
             <a:avLst>
@@ -7736,14 +7802,13 @@
           </p:cNvPr>
           <p:cNvCxnSpPr>
             <a:cxnSpLocks/>
-            <a:stCxn id="23" idx="3"/>
           </p:cNvCxnSpPr>
           <p:nvPr/>
         </p:nvCxnSpPr>
         <p:spPr>
-          <a:xfrm flipV="1">
-            <a:off x="3773508" y="2976739"/>
-            <a:ext cx="4368686" cy="800274"/>
+          <a:xfrm>
+            <a:off x="5881255" y="2847109"/>
+            <a:ext cx="2213263" cy="218205"/>
           </a:xfrm>
           <a:prstGeom prst="line">
             <a:avLst/>
@@ -7783,8 +7848,8 @@
         </p:nvSpPr>
         <p:spPr>
           <a:xfrm>
-            <a:off x="3778624" y="2911288"/>
-            <a:ext cx="6212541" cy="2400215"/>
+            <a:off x="6511433" y="2028060"/>
+            <a:ext cx="3479732" cy="2836250"/>
           </a:xfrm>
           <a:custGeom>
             <a:avLst/>
@@ -7795,34 +7860,82 @@
               <a:gd name="connsiteY1" fmla="*/ 2359959 h 2400215"/>
               <a:gd name="connsiteX2" fmla="*/ 6212541 w 6212541"/>
               <a:gd name="connsiteY2" fmla="*/ 1264024 h 2400215"/>
+              <a:gd name="csX0" fmla="*/ 0 w 3469341"/>
+              <a:gd name="csY0" fmla="*/ 0 h 2826243"/>
+              <a:gd name="csX1" fmla="*/ 1411941 w 3469341"/>
+              <a:gd name="csY1" fmla="*/ 2785987 h 2826243"/>
+              <a:gd name="csX2" fmla="*/ 3469341 w 3469341"/>
+              <a:gd name="csY2" fmla="*/ 1690052 h 2826243"/>
+              <a:gd name="csX0" fmla="*/ 0 w 3469341"/>
+              <a:gd name="csY0" fmla="*/ 0 h 2826243"/>
+              <a:gd name="csX1" fmla="*/ 1411941 w 3469341"/>
+              <a:gd name="csY1" fmla="*/ 2785987 h 2826243"/>
+              <a:gd name="csX2" fmla="*/ 3469341 w 3469341"/>
+              <a:gd name="csY2" fmla="*/ 1690052 h 2826243"/>
+              <a:gd name="csX0" fmla="*/ 0 w 3469341"/>
+              <a:gd name="csY0" fmla="*/ 0 h 2286564"/>
+              <a:gd name="csX1" fmla="*/ 1921095 w 3469341"/>
+              <a:gd name="csY1" fmla="*/ 2172923 h 2286564"/>
+              <a:gd name="csX2" fmla="*/ 3469341 w 3469341"/>
+              <a:gd name="csY2" fmla="*/ 1690052 h 2286564"/>
+              <a:gd name="csX0" fmla="*/ 0 w 3479732"/>
+              <a:gd name="csY0" fmla="*/ 0 h 2743764"/>
+              <a:gd name="csX1" fmla="*/ 1931486 w 3479732"/>
+              <a:gd name="csY1" fmla="*/ 2630123 h 2743764"/>
+              <a:gd name="csX2" fmla="*/ 3479732 w 3479732"/>
+              <a:gd name="csY2" fmla="*/ 2147252 h 2743764"/>
+              <a:gd name="csX0" fmla="*/ 0 w 3479732"/>
+              <a:gd name="csY0" fmla="*/ 0 h 2634903"/>
+              <a:gd name="csX1" fmla="*/ 1931486 w 3479732"/>
+              <a:gd name="csY1" fmla="*/ 2630123 h 2634903"/>
+              <a:gd name="csX2" fmla="*/ 3479732 w 3479732"/>
+              <a:gd name="csY2" fmla="*/ 2147252 h 2634903"/>
+              <a:gd name="csX0" fmla="*/ 0 w 3479732"/>
+              <a:gd name="csY0" fmla="*/ 0 h 2634903"/>
+              <a:gd name="csX1" fmla="*/ 1931486 w 3479732"/>
+              <a:gd name="csY1" fmla="*/ 2630123 h 2634903"/>
+              <a:gd name="csX2" fmla="*/ 3479732 w 3479732"/>
+              <a:gd name="csY2" fmla="*/ 2147252 h 2634903"/>
+              <a:gd name="csX0" fmla="*/ 0 w 3479732"/>
+              <a:gd name="csY0" fmla="*/ 0 h 2819456"/>
+              <a:gd name="csX1" fmla="*/ 1931486 w 3479732"/>
+              <a:gd name="csY1" fmla="*/ 2630123 h 2819456"/>
+              <a:gd name="csX2" fmla="*/ 3479732 w 3479732"/>
+              <a:gd name="csY2" fmla="*/ 2147252 h 2819456"/>
+              <a:gd name="csX0" fmla="*/ 0 w 3479732"/>
+              <a:gd name="csY0" fmla="*/ 0 h 2836250"/>
+              <a:gd name="csX1" fmla="*/ 1931486 w 3479732"/>
+              <a:gd name="csY1" fmla="*/ 2630123 h 2836250"/>
+              <a:gd name="csX2" fmla="*/ 3479732 w 3479732"/>
+              <a:gd name="csY2" fmla="*/ 2147252 h 2836250"/>
             </a:gdLst>
             <a:ahLst/>
             <a:cxnLst>
               <a:cxn ang="0">
-                <a:pos x="connsiteX0" y="connsiteY0"/>
+                <a:pos x="csX0" y="csY0"/>
               </a:cxn>
               <a:cxn ang="0">
-                <a:pos x="connsiteX1" y="connsiteY1"/>
+                <a:pos x="csX1" y="csY1"/>
               </a:cxn>
               <a:cxn ang="0">
-                <a:pos x="connsiteX2" y="connsiteY2"/>
+                <a:pos x="csX2" y="csY2"/>
               </a:cxn>
             </a:cxnLst>
             <a:rect l="l" t="t" r="r" b="b"/>
             <a:pathLst>
-              <a:path w="6212541" h="2400215">
+              <a:path w="3479732" h="2836250">
                 <a:moveTo>
                   <a:pt x="0" y="0"/>
                 </a:moveTo>
                 <a:cubicBezTo>
-                  <a:pt x="1559859" y="1074644"/>
-                  <a:pt x="3119718" y="2149288"/>
-                  <a:pt x="4155141" y="2359959"/>
+                  <a:pt x="1352041" y="1209726"/>
+                  <a:pt x="937626" y="2190851"/>
+                  <a:pt x="1931486" y="2630123"/>
                 </a:cubicBezTo>
                 <a:cubicBezTo>
-                  <a:pt x="5190564" y="2570630"/>
-                  <a:pt x="5701552" y="1917327"/>
-                  <a:pt x="6212541" y="1264024"/>
+                  <a:pt x="2925346" y="3069395"/>
+                  <a:pt x="3270080" y="2758991"/>
+                  <a:pt x="3479732" y="2147252"/>
                 </a:cubicBezTo>
               </a:path>
             </a:pathLst>

--- a/images/charts.pptx
+++ b/images/charts.pptx
@@ -6819,10 +6819,10 @@
       </p:grpSpPr>
       <p:pic>
         <p:nvPicPr>
-          <p:cNvPr id="2" name="図 1">
+          <p:cNvPr id="23" name="図 22">
             <a:extLst>
               <a:ext uri="{FF2B5EF4-FFF2-40B4-BE49-F238E27FC236}">
-                <a16:creationId xmlns:a16="http://schemas.microsoft.com/office/drawing/2014/main" id="{07A8180F-6762-5120-CCF6-5A61E0AB5191}"/>
+                <a16:creationId xmlns:a16="http://schemas.microsoft.com/office/drawing/2014/main" id="{1B4C74C8-8F04-AE52-13ED-91BBFA64EBB5}"/>
               </a:ext>
             </a:extLst>
           </p:cNvPr>
@@ -6833,15 +6833,15 @@
         </p:nvPicPr>
         <p:blipFill>
           <a:blip r:embed="rId2"/>
-          <a:srcRect t="28966" r="13506"/>
+          <a:srcRect l="4394"/>
           <a:stretch>
             <a:fillRect/>
           </a:stretch>
         </p:blipFill>
         <p:spPr>
           <a:xfrm>
-            <a:off x="166215" y="1110835"/>
-            <a:ext cx="7394893" cy="4137291"/>
+            <a:off x="289915" y="800782"/>
+            <a:ext cx="8991389" cy="4616081"/>
           </a:xfrm>
           <a:prstGeom prst="rect">
             <a:avLst/>
@@ -6898,8 +6898,8 @@
         </p:nvSpPr>
         <p:spPr>
           <a:xfrm>
-            <a:off x="1052588" y="1609873"/>
-            <a:ext cx="4078735" cy="1629013"/>
+            <a:off x="1052588" y="1441137"/>
+            <a:ext cx="4078735" cy="1797749"/>
           </a:xfrm>
           <a:prstGeom prst="roundRect">
             <a:avLst>
@@ -7006,8 +7006,8 @@
         </p:nvSpPr>
         <p:spPr>
           <a:xfrm>
-            <a:off x="1368876" y="1874486"/>
-            <a:ext cx="3682498" cy="549894"/>
+            <a:off x="1368876" y="1697834"/>
+            <a:ext cx="3682498" cy="642178"/>
           </a:xfrm>
           <a:prstGeom prst="roundRect">
             <a:avLst>
@@ -7108,7 +7108,7 @@
         <p:spPr>
           <a:xfrm flipV="1">
             <a:off x="5131323" y="1735282"/>
-            <a:ext cx="2651468" cy="689098"/>
+            <a:ext cx="2651468" cy="604730"/>
           </a:xfrm>
           <a:prstGeom prst="line">
             <a:avLst/>
@@ -7200,99 +7200,12 @@
           <a:chExt cx="0" cy="0"/>
         </a:xfrm>
       </p:grpSpPr>
-      <p:grpSp>
-        <p:nvGrpSpPr>
-          <p:cNvPr id="6" name="グループ化 5">
-            <a:extLst>
-              <a:ext uri="{FF2B5EF4-FFF2-40B4-BE49-F238E27FC236}">
-                <a16:creationId xmlns:a16="http://schemas.microsoft.com/office/drawing/2014/main" id="{F671B84D-2A7A-CDDE-77C4-9DB431CC2659}"/>
-              </a:ext>
-            </a:extLst>
-          </p:cNvPr>
-          <p:cNvGrpSpPr/>
-          <p:nvPr/>
-        </p:nvGrpSpPr>
-        <p:grpSpPr>
-          <a:xfrm>
-            <a:off x="72829" y="658379"/>
-            <a:ext cx="8590654" cy="4384366"/>
-            <a:chOff x="198159" y="1886106"/>
-            <a:chExt cx="7809685" cy="3985787"/>
-          </a:xfrm>
-        </p:grpSpPr>
-        <p:pic>
-          <p:nvPicPr>
-            <p:cNvPr id="5" name="図 4">
-              <a:extLst>
-                <a:ext uri="{FF2B5EF4-FFF2-40B4-BE49-F238E27FC236}">
-                  <a16:creationId xmlns:a16="http://schemas.microsoft.com/office/drawing/2014/main" id="{B8D10A9C-E042-CA0B-C6DB-824B5E045A91}"/>
-                </a:ext>
-              </a:extLst>
-            </p:cNvPr>
-            <p:cNvPicPr>
-              <a:picLocks noChangeAspect="1"/>
-            </p:cNvPicPr>
-            <p:nvPr/>
-          </p:nvPicPr>
-          <p:blipFill>
-            <a:blip r:embed="rId2"/>
-            <a:stretch>
-              <a:fillRect/>
-            </a:stretch>
-          </p:blipFill>
-          <p:spPr>
-            <a:xfrm>
-              <a:off x="198159" y="5367619"/>
-              <a:ext cx="7772400" cy="504274"/>
-            </a:xfrm>
-            <a:prstGeom prst="rect">
-              <a:avLst/>
-            </a:prstGeom>
-          </p:spPr>
-        </p:pic>
-        <p:pic>
-          <p:nvPicPr>
-            <p:cNvPr id="4" name="図 3" descr="グラフィカル ユーザー インターフェイス, テキスト, アプリケーション&#10;&#10;AI 生成コンテンツは誤りを含む可能性があります。">
-              <a:extLst>
-                <a:ext uri="{FF2B5EF4-FFF2-40B4-BE49-F238E27FC236}">
-                  <a16:creationId xmlns:a16="http://schemas.microsoft.com/office/drawing/2014/main" id="{87E92C9A-EE92-6DB0-6ED0-EE24CB0CC031}"/>
-                </a:ext>
-              </a:extLst>
-            </p:cNvPr>
-            <p:cNvPicPr>
-              <a:picLocks noChangeAspect="1"/>
-            </p:cNvPicPr>
-            <p:nvPr/>
-          </p:nvPicPr>
-          <p:blipFill>
-            <a:blip r:embed="rId3">
-              <a:extLst>
-                <a:ext uri="{28A0092B-C50C-407E-A947-70E740481C1C}">
-                  <a14:useLocalDpi xmlns:a14="http://schemas.microsoft.com/office/drawing/2010/main" val="0"/>
-                </a:ext>
-              </a:extLst>
-            </a:blip>
-            <a:stretch>
-              <a:fillRect/>
-            </a:stretch>
-          </p:blipFill>
-          <p:spPr>
-            <a:xfrm>
-              <a:off x="235444" y="1886106"/>
-              <a:ext cx="7772400" cy="3540881"/>
-            </a:xfrm>
-            <a:prstGeom prst="rect">
-              <a:avLst/>
-            </a:prstGeom>
-          </p:spPr>
-        </p:pic>
-      </p:grpSp>
       <p:pic>
         <p:nvPicPr>
-          <p:cNvPr id="21" name="図 20" descr="ダイアグラム&#10;&#10;自動的に生成された説明">
+          <p:cNvPr id="25" name="図 24">
             <a:extLst>
               <a:ext uri="{FF2B5EF4-FFF2-40B4-BE49-F238E27FC236}">
-                <a16:creationId xmlns:a16="http://schemas.microsoft.com/office/drawing/2014/main" id="{7CDD49B4-2D54-004F-8410-A23164296822}"/>
+                <a16:creationId xmlns:a16="http://schemas.microsoft.com/office/drawing/2014/main" id="{FCEAD289-4028-E871-A40A-5BC3AB1BDBC7}"/>
               </a:ext>
             </a:extLst>
           </p:cNvPr>
@@ -7302,7 +7215,38 @@
           <p:nvPr/>
         </p:nvPicPr>
         <p:blipFill>
-          <a:blip r:embed="rId4">
+          <a:blip r:embed="rId2"/>
+          <a:srcRect l="3452"/>
+          <a:stretch>
+            <a:fillRect/>
+          </a:stretch>
+        </p:blipFill>
+        <p:spPr>
+          <a:xfrm>
+            <a:off x="509154" y="858566"/>
+            <a:ext cx="8254537" cy="4413495"/>
+          </a:xfrm>
+          <a:prstGeom prst="rect">
+            <a:avLst/>
+          </a:prstGeom>
+        </p:spPr>
+      </p:pic>
+      <p:pic>
+        <p:nvPicPr>
+          <p:cNvPr id="21" name="図 20" descr="ダイアグラム&#10;&#10;自動的に生成された説明">
+            <a:extLst>
+              <a:ext uri="{FF2B5EF4-FFF2-40B4-BE49-F238E27FC236}">
+                <a16:creationId xmlns:a16="http://schemas.microsoft.com/office/drawing/2014/main" id="{7CDD49B4-2D54-004F-8410-A23164296822}"/>
+              </a:ext>
+            </a:extLst>
+          </p:cNvPr>
+          <p:cNvPicPr>
+            <a:picLocks noChangeAspect="1"/>
+          </p:cNvPicPr>
+          <p:nvPr/>
+        </p:nvPicPr>
+        <p:blipFill>
+          <a:blip r:embed="rId3">
             <a:extLst>
               <a:ext uri="{28A0092B-C50C-407E-A947-70E740481C1C}">
                 <a14:useLocalDpi xmlns:a14="http://schemas.microsoft.com/office/drawing/2010/main" val="0"/>
